--- a/slides/ch14-interviewing-and-follow-up.pptx
+++ b/slides/ch14-interviewing-and-follow-up.pptx
@@ -9194,7 +9194,7 @@
                 </a:solidFill>
                 <a:latin typeface="Calibri"/>
               </a:rPr>
-              <a:t>'your point about the supplier audit backlog' — specificity proves presence (the five-S rules, Chapter 6).</a:t>
+              <a:t>'your point about the supplier audit backlog' — specificity proves presence (the five-quality rules, Chapter 6).</a:t>
             </a:r>
           </a:p>
           <a:p>

--- a/slides/ch14-interviewing-and-follow-up.pptx
+++ b/slides/ch14-interviewing-and-follow-up.pptx
@@ -5884,7 +5884,7 @@
                 </a:solidFill>
                 <a:latin typeface="Calibri"/>
               </a:rPr>
-              <a:t>BADM 225 · Chapter 14</a:t>
+              <a:t>BADM 225 · Chapter 14  ·  © Derek D. Bussan</a:t>
             </a:r>
           </a:p>
         </p:txBody>
@@ -6171,7 +6171,7 @@
                 </a:solidFill>
                 <a:latin typeface="Calibri"/>
               </a:rPr>
-              <a:t>BADM 225 · Chapter 14</a:t>
+              <a:t>BADM 225 · Chapter 14  ·  © Derek D. Bussan</a:t>
             </a:r>
           </a:p>
         </p:txBody>
@@ -6458,7 +6458,7 @@
                 </a:solidFill>
                 <a:latin typeface="Calibri"/>
               </a:rPr>
-              <a:t>BADM 225 · Chapter 14</a:t>
+              <a:t>BADM 225 · Chapter 14  ·  © Derek D. Bussan</a:t>
             </a:r>
           </a:p>
         </p:txBody>
@@ -6745,7 +6745,7 @@
                 </a:solidFill>
                 <a:latin typeface="Calibri"/>
               </a:rPr>
-              <a:t>BADM 225 · Chapter 14</a:t>
+              <a:t>BADM 225 · Chapter 14  ·  © Derek D. Bussan</a:t>
             </a:r>
           </a:p>
         </p:txBody>
@@ -7032,7 +7032,7 @@
                 </a:solidFill>
                 <a:latin typeface="Calibri"/>
               </a:rPr>
-              <a:t>BADM 225 · Chapter 14</a:t>
+              <a:t>BADM 225 · Chapter 14  ·  © Derek D. Bussan</a:t>
             </a:r>
           </a:p>
         </p:txBody>
@@ -7474,7 +7474,7 @@
                 </a:solidFill>
                 <a:latin typeface="Calibri"/>
               </a:rPr>
-              <a:t>BADM 225 · Chapter 14</a:t>
+              <a:t>BADM 225 · Chapter 14  ·  © Derek D. Bussan</a:t>
             </a:r>
           </a:p>
         </p:txBody>
@@ -7839,7 +7839,7 @@
                 </a:solidFill>
                 <a:latin typeface="Calibri"/>
               </a:rPr>
-              <a:t>BADM 225 · Chapter 14</a:t>
+              <a:t>BADM 225 · Chapter 14  ·  © Derek D. Bussan</a:t>
             </a:r>
           </a:p>
         </p:txBody>
@@ -7967,7 +7967,7 @@
                 </a:solidFill>
                 <a:latin typeface="Calibri"/>
               </a:rPr>
-              <a:t>BADM 225 · Chapter 14</a:t>
+              <a:t>BADM 225 · Chapter 14  ·  © Derek D. Bussan</a:t>
             </a:r>
           </a:p>
         </p:txBody>
@@ -8254,7 +8254,7 @@
                 </a:solidFill>
                 <a:latin typeface="Calibri"/>
               </a:rPr>
-              <a:t>BADM 225 · Chapter 14</a:t>
+              <a:t>BADM 225 · Chapter 14  ·  © Derek D. Bussan</a:t>
             </a:r>
           </a:p>
         </p:txBody>
@@ -8619,7 +8619,7 @@
                 </a:solidFill>
                 <a:latin typeface="Calibri"/>
               </a:rPr>
-              <a:t>BADM 225 · Chapter 14</a:t>
+              <a:t>BADM 225 · Chapter 14  ·  © Derek D. Bussan</a:t>
             </a:r>
           </a:p>
         </p:txBody>
@@ -8747,7 +8747,7 @@
                 </a:solidFill>
                 <a:latin typeface="Calibri"/>
               </a:rPr>
-              <a:t>BADM 225 · Chapter 14</a:t>
+              <a:t>BADM 225 · Chapter 14  ·  © Derek D. Bussan</a:t>
             </a:r>
           </a:p>
         </p:txBody>
@@ -9068,7 +9068,7 @@
                 </a:solidFill>
                 <a:latin typeface="Calibri"/>
               </a:rPr>
-              <a:t>BADM 225 · Chapter 14</a:t>
+              <a:t>BADM 225 · Chapter 14  ·  © Derek D. Bussan</a:t>
             </a:r>
           </a:p>
         </p:txBody>
@@ -9355,7 +9355,7 @@
                 </a:solidFill>
                 <a:latin typeface="Calibri"/>
               </a:rPr>
-              <a:t>BADM 225 · Chapter 14</a:t>
+              <a:t>BADM 225 · Chapter 14  ·  © Derek D. Bussan</a:t>
             </a:r>
           </a:p>
         </p:txBody>
@@ -9642,7 +9642,7 @@
                 </a:solidFill>
                 <a:latin typeface="Calibri"/>
               </a:rPr>
-              <a:t>BADM 225 · Chapter 14</a:t>
+              <a:t>BADM 225 · Chapter 14  ·  © Derek D. Bussan</a:t>
             </a:r>
           </a:p>
         </p:txBody>
@@ -9929,7 +9929,7 @@
                 </a:solidFill>
                 <a:latin typeface="Calibri"/>
               </a:rPr>
-              <a:t>BADM 225 · Chapter 14</a:t>
+              <a:t>BADM 225 · Chapter 14  ·  © Derek D. Bussan</a:t>
             </a:r>
           </a:p>
         </p:txBody>
@@ -10216,7 +10216,7 @@
                 </a:solidFill>
                 <a:latin typeface="Calibri"/>
               </a:rPr>
-              <a:t>BADM 225 · Chapter 14</a:t>
+              <a:t>BADM 225 · Chapter 14  ·  © Derek D. Bussan</a:t>
             </a:r>
           </a:p>
         </p:txBody>
@@ -10503,7 +10503,7 @@
                 </a:solidFill>
                 <a:latin typeface="Calibri"/>
               </a:rPr>
-              <a:t>BADM 225 · Chapter 14</a:t>
+              <a:t>BADM 225 · Chapter 14  ·  © Derek D. Bussan</a:t>
             </a:r>
           </a:p>
         </p:txBody>
@@ -10790,7 +10790,7 @@
                 </a:solidFill>
                 <a:latin typeface="Calibri"/>
               </a:rPr>
-              <a:t>BADM 225 · Chapter 14</a:t>
+              <a:t>BADM 225 · Chapter 14  ·  © Derek D. Bussan</a:t>
             </a:r>
           </a:p>
         </p:txBody>
@@ -11077,7 +11077,7 @@
                 </a:solidFill>
                 <a:latin typeface="Calibri"/>
               </a:rPr>
-              <a:t>BADM 225 · Chapter 14</a:t>
+              <a:t>BADM 225 · Chapter 14  ·  © Derek D. Bussan</a:t>
             </a:r>
           </a:p>
         </p:txBody>
@@ -11364,7 +11364,7 @@
                 </a:solidFill>
                 <a:latin typeface="Calibri"/>
               </a:rPr>
-              <a:t>BADM 225 · Chapter 14</a:t>
+              <a:t>BADM 225 · Chapter 14  ·  © Derek D. Bussan</a:t>
             </a:r>
           </a:p>
         </p:txBody>
@@ -12179,7 +12179,7 @@
                 </a:solidFill>
                 <a:latin typeface="Calibri"/>
               </a:rPr>
-              <a:t>BADM 225 · Chapter 14</a:t>
+              <a:t>BADM 225 · Chapter 14  ·  © Derek D. Bussan</a:t>
             </a:r>
           </a:p>
         </p:txBody>
@@ -12385,7 +12385,7 @@
                 </a:solidFill>
                 <a:latin typeface="Calibri"/>
               </a:rPr>
-              <a:t>BADM 225 · Chapter 14</a:t>
+              <a:t>BADM 225 · Chapter 14  ·  © Derek D. Bussan</a:t>
             </a:r>
           </a:p>
         </p:txBody>
@@ -12661,7 +12661,7 @@
                 </a:solidFill>
                 <a:latin typeface="Calibri"/>
               </a:rPr>
-              <a:t>BADM 225 · Chapter 14</a:t>
+              <a:t>BADM 225 · Chapter 14  ·  © Derek D. Bussan</a:t>
             </a:r>
           </a:p>
         </p:txBody>
@@ -12754,7 +12754,7 @@
                 </a:solidFill>
                 <a:latin typeface="Calibri"/>
               </a:rPr>
-              <a:t>BADM 225 · Chapter 14</a:t>
+              <a:t>BADM 225 · Chapter 14  ·  © Derek D. Bussan</a:t>
             </a:r>
           </a:p>
         </p:txBody>
@@ -13075,7 +13075,7 @@
                 </a:solidFill>
                 <a:latin typeface="Calibri"/>
               </a:rPr>
-              <a:t>BADM 225 · Chapter 14</a:t>
+              <a:t>BADM 225 · Chapter 14  ·  © Derek D. Bussan</a:t>
             </a:r>
           </a:p>
         </p:txBody>
@@ -13743,7 +13743,7 @@
                 </a:solidFill>
                 <a:latin typeface="Calibri"/>
               </a:rPr>
-              <a:t>BADM 225 · Chapter 14</a:t>
+              <a:t>BADM 225 · Chapter 14  ·  © Derek D. Bussan</a:t>
             </a:r>
           </a:p>
         </p:txBody>
@@ -14030,7 +14030,7 @@
                 </a:solidFill>
                 <a:latin typeface="Calibri"/>
               </a:rPr>
-              <a:t>BADM 225 · Chapter 14</a:t>
+              <a:t>BADM 225 · Chapter 14  ·  © Derek D. Bussan</a:t>
             </a:r>
           </a:p>
         </p:txBody>
@@ -14592,7 +14592,7 @@
                 </a:solidFill>
                 <a:latin typeface="Calibri"/>
               </a:rPr>
-              <a:t>BADM 225 · Chapter 14</a:t>
+              <a:t>BADM 225 · Chapter 14  ·  © Derek D. Bussan</a:t>
             </a:r>
           </a:p>
         </p:txBody>
@@ -14879,7 +14879,7 @@
                 </a:solidFill>
                 <a:latin typeface="Calibri"/>
               </a:rPr>
-              <a:t>BADM 225 · Chapter 14</a:t>
+              <a:t>BADM 225 · Chapter 14  ·  © Derek D. Bussan</a:t>
             </a:r>
           </a:p>
         </p:txBody>
@@ -15278,7 +15278,7 @@
                 </a:solidFill>
                 <a:latin typeface="Calibri"/>
               </a:rPr>
-              <a:t>BADM 225 · Chapter 14</a:t>
+              <a:t>BADM 225 · Chapter 14  ·  © Derek D. Bussan</a:t>
             </a:r>
           </a:p>
         </p:txBody>

--- a/slides/ch14-interviewing-and-follow-up.pptx
+++ b/slides/ch14-interviewing-and-follow-up.pptx
@@ -5791,7 +5791,7 @@
                 </a:solidFill>
                 <a:latin typeface="Calibri"/>
               </a:rPr>
-              <a:t>BADM 225 · Chapter 14  ·  Original instructional material — no publisher content</a:t>
+              <a:t>BADM 225 · Chapter 14  ·  Original material © 2026 Derek D. Bussan, PhD, MBA  ·  No publisher content</a:t>
             </a:r>
           </a:p>
         </p:txBody>
